--- a/prompt_engineering/pe-2-prompting-multistep-iterative.pptx
+++ b/prompt_engineering/pe-2-prompting-multistep-iterative.pptx
@@ -5,7 +5,7 @@
     <p:sldMasterId id="2147483648" r:id="rId1"/>
   </p:sldMasterIdLst>
   <p:handoutMasterIdLst>
-    <p:handoutMasterId r:id="rId10"/>
+    <p:handoutMasterId r:id="rId12"/>
   </p:handoutMasterIdLst>
   <p:sldIdLst>
     <p:sldId id="257" r:id="rId2"/>
@@ -13,9 +13,11 @@
     <p:sldId id="282" r:id="rId4"/>
     <p:sldId id="283" r:id="rId5"/>
     <p:sldId id="284" r:id="rId6"/>
-    <p:sldId id="285" r:id="rId7"/>
-    <p:sldId id="269" r:id="rId8"/>
-    <p:sldId id="286" r:id="rId9"/>
+    <p:sldId id="287" r:id="rId7"/>
+    <p:sldId id="285" r:id="rId8"/>
+    <p:sldId id="288" r:id="rId9"/>
+    <p:sldId id="269" r:id="rId10"/>
+    <p:sldId id="286" r:id="rId11"/>
   </p:sldIdLst>
   <p:sldSz cx="12192000" cy="6858000"/>
   <p:notesSz cx="6858000" cy="9144000"/>
@@ -219,7 +221,7 @@
           <a:p>
             <a:fld id="{7BAEECA8-D063-486F-AE31-5020270C1449}" type="datetimeFigureOut">
               <a:rPr lang="en-US" smtClean="0"/>
-              <a:t>4/21/2026</a:t>
+              <a:t>5/27/2026</a:t>
             </a:fld>
             <a:endParaRPr lang="en-US"/>
           </a:p>
@@ -461,7 +463,7 @@
           <a:p>
             <a:fld id="{6383FAE1-13DE-4511-8C1B-C8AFB720664C}" type="datetimeFigureOut">
               <a:rPr lang="en-US" smtClean="0"/>
-              <a:t>4/21/2026</a:t>
+              <a:t>5/27/2026</a:t>
             </a:fld>
             <a:endParaRPr lang="en-US"/>
           </a:p>
@@ -659,7 +661,7 @@
           <a:p>
             <a:fld id="{6383FAE1-13DE-4511-8C1B-C8AFB720664C}" type="datetimeFigureOut">
               <a:rPr lang="en-US" smtClean="0"/>
-              <a:t>4/21/2026</a:t>
+              <a:t>5/27/2026</a:t>
             </a:fld>
             <a:endParaRPr lang="en-US"/>
           </a:p>
@@ -867,7 +869,7 @@
           <a:p>
             <a:fld id="{6383FAE1-13DE-4511-8C1B-C8AFB720664C}" type="datetimeFigureOut">
               <a:rPr lang="en-US" smtClean="0"/>
-              <a:t>4/21/2026</a:t>
+              <a:t>5/27/2026</a:t>
             </a:fld>
             <a:endParaRPr lang="en-US"/>
           </a:p>
@@ -1065,7 +1067,7 @@
           <a:p>
             <a:fld id="{6383FAE1-13DE-4511-8C1B-C8AFB720664C}" type="datetimeFigureOut">
               <a:rPr lang="en-US" smtClean="0"/>
-              <a:t>4/21/2026</a:t>
+              <a:t>5/27/2026</a:t>
             </a:fld>
             <a:endParaRPr lang="en-US"/>
           </a:p>
@@ -1340,7 +1342,7 @@
           <a:p>
             <a:fld id="{6383FAE1-13DE-4511-8C1B-C8AFB720664C}" type="datetimeFigureOut">
               <a:rPr lang="en-US" smtClean="0"/>
-              <a:t>4/21/2026</a:t>
+              <a:t>5/27/2026</a:t>
             </a:fld>
             <a:endParaRPr lang="en-US"/>
           </a:p>
@@ -1605,7 +1607,7 @@
           <a:p>
             <a:fld id="{6383FAE1-13DE-4511-8C1B-C8AFB720664C}" type="datetimeFigureOut">
               <a:rPr lang="en-US" smtClean="0"/>
-              <a:t>4/21/2026</a:t>
+              <a:t>5/27/2026</a:t>
             </a:fld>
             <a:endParaRPr lang="en-US"/>
           </a:p>
@@ -2017,7 +2019,7 @@
           <a:p>
             <a:fld id="{6383FAE1-13DE-4511-8C1B-C8AFB720664C}" type="datetimeFigureOut">
               <a:rPr lang="en-US" smtClean="0"/>
-              <a:t>4/21/2026</a:t>
+              <a:t>5/27/2026</a:t>
             </a:fld>
             <a:endParaRPr lang="en-US"/>
           </a:p>
@@ -2158,7 +2160,7 @@
           <a:p>
             <a:fld id="{6383FAE1-13DE-4511-8C1B-C8AFB720664C}" type="datetimeFigureOut">
               <a:rPr lang="en-US" smtClean="0"/>
-              <a:t>4/21/2026</a:t>
+              <a:t>5/27/2026</a:t>
             </a:fld>
             <a:endParaRPr lang="en-US"/>
           </a:p>
@@ -2271,7 +2273,7 @@
           <a:p>
             <a:fld id="{6383FAE1-13DE-4511-8C1B-C8AFB720664C}" type="datetimeFigureOut">
               <a:rPr lang="en-US" smtClean="0"/>
-              <a:t>4/21/2026</a:t>
+              <a:t>5/27/2026</a:t>
             </a:fld>
             <a:endParaRPr lang="en-US"/>
           </a:p>
@@ -2582,7 +2584,7 @@
           <a:p>
             <a:fld id="{6383FAE1-13DE-4511-8C1B-C8AFB720664C}" type="datetimeFigureOut">
               <a:rPr lang="en-US" smtClean="0"/>
-              <a:t>4/21/2026</a:t>
+              <a:t>5/27/2026</a:t>
             </a:fld>
             <a:endParaRPr lang="en-US"/>
           </a:p>
@@ -2873,7 +2875,7 @@
           <a:p>
             <a:fld id="{6383FAE1-13DE-4511-8C1B-C8AFB720664C}" type="datetimeFigureOut">
               <a:rPr lang="en-US" smtClean="0"/>
-              <a:t>4/21/2026</a:t>
+              <a:t>5/27/2026</a:t>
             </a:fld>
             <a:endParaRPr lang="en-US"/>
           </a:p>
@@ -3117,7 +3119,7 @@
           <a:p>
             <a:fld id="{6383FAE1-13DE-4511-8C1B-C8AFB720664C}" type="datetimeFigureOut">
               <a:rPr lang="en-US" smtClean="0"/>
-              <a:t>4/21/2026</a:t>
+              <a:t>5/27/2026</a:t>
             </a:fld>
             <a:endParaRPr lang="en-US"/>
           </a:p>
@@ -3754,6 +3756,42 @@
 </p:sld>
 </file>
 
+<file path=ppt/slides/slide10.xml><?xml version="1.0" encoding="utf-8"?>
+<p:sld xmlns:a="http://schemas.openxmlformats.org/drawingml/2006/main" xmlns:r="http://schemas.openxmlformats.org/officeDocument/2006/relationships" xmlns:p="http://schemas.openxmlformats.org/presentationml/2006/main">
+  <p:cSld>
+    <p:spTree>
+      <p:nvGrpSpPr>
+        <p:cNvPr id="1" name="">
+          <a:extLst>
+            <a:ext uri="{FF2B5EF4-FFF2-40B4-BE49-F238E27FC236}">
+              <a16:creationId xmlns:a16="http://schemas.microsoft.com/office/drawing/2014/main" id="{8033F83F-CC0B-EBD0-83A9-B6B5C6F14088}"/>
+            </a:ext>
+          </a:extLst>
+        </p:cNvPr>
+        <p:cNvGrpSpPr/>
+        <p:nvPr/>
+      </p:nvGrpSpPr>
+      <p:grpSpPr>
+        <a:xfrm>
+          <a:off x="0" y="0"/>
+          <a:ext cx="0" cy="0"/>
+          <a:chOff x="0" y="0"/>
+          <a:chExt cx="0" cy="0"/>
+        </a:xfrm>
+      </p:grpSpPr>
+    </p:spTree>
+    <p:extLst>
+      <p:ext uri="{BB962C8B-B14F-4D97-AF65-F5344CB8AC3E}">
+        <p14:creationId xmlns:p14="http://schemas.microsoft.com/office/powerpoint/2010/main" val="3872959198"/>
+      </p:ext>
+    </p:extLst>
+  </p:cSld>
+  <p:clrMapOvr>
+    <a:masterClrMapping/>
+  </p:clrMapOvr>
+</p:sld>
+</file>
+
 <file path=ppt/slides/slide2.xml><?xml version="1.0" encoding="utf-8"?>
 <p:sld xmlns:a="http://schemas.openxmlformats.org/drawingml/2006/main" xmlns:r="http://schemas.openxmlformats.org/officeDocument/2006/relationships" xmlns:p="http://schemas.openxmlformats.org/presentationml/2006/main">
   <p:cSld>
@@ -3791,8 +3829,8 @@
         </p:nvSpPr>
         <p:spPr>
           <a:xfrm>
-            <a:off x="310896" y="632914"/>
-            <a:ext cx="11512296" cy="2308324"/>
+            <a:off x="202692" y="696922"/>
+            <a:ext cx="5893308" cy="830997"/>
           </a:xfrm>
           <a:prstGeom prst="rect">
             <a:avLst/>
@@ -3830,26 +3868,35 @@
               <a:t>👉 Breaking one task into smaller steps</a:t>
             </a:r>
           </a:p>
-          <a:p>
-            <a:endParaRPr lang="en-US" sz="2400" dirty="0">
-              <a:solidFill>
-                <a:schemeClr val="accent6">
-                  <a:lumMod val="60000"/>
-                  <a:lumOff val="40000"/>
-                </a:schemeClr>
-              </a:solidFill>
-            </a:endParaRPr>
-          </a:p>
-          <a:p>
-            <a:endParaRPr lang="en-US" sz="2400" dirty="0">
-              <a:solidFill>
-                <a:schemeClr val="accent6">
-                  <a:lumMod val="60000"/>
-                  <a:lumOff val="40000"/>
-                </a:schemeClr>
-              </a:solidFill>
-            </a:endParaRPr>
-          </a:p>
+        </p:txBody>
+      </p:sp>
+      <p:sp>
+        <p:nvSpPr>
+          <p:cNvPr id="3" name="TextBox 2">
+            <a:extLst>
+              <a:ext uri="{FF2B5EF4-FFF2-40B4-BE49-F238E27FC236}">
+                <a16:creationId xmlns:a16="http://schemas.microsoft.com/office/drawing/2014/main" id="{33AF7177-4004-C235-D1C9-199A51591286}"/>
+              </a:ext>
+            </a:extLst>
+          </p:cNvPr>
+          <p:cNvSpPr txBox="1"/>
+          <p:nvPr/>
+        </p:nvSpPr>
+        <p:spPr>
+          <a:xfrm>
+            <a:off x="6204204" y="632914"/>
+            <a:ext cx="6190488" cy="1200329"/>
+          </a:xfrm>
+          <a:prstGeom prst="rect">
+            <a:avLst/>
+          </a:prstGeom>
+          <a:noFill/>
+        </p:spPr>
+        <p:txBody>
+          <a:bodyPr wrap="square">
+            <a:spAutoFit/>
+          </a:bodyPr>
+          <a:lstStyle/>
           <a:p>
             <a:r>
               <a:rPr lang="en-US" sz="2400" b="1" dirty="0">
@@ -3951,7 +3998,7 @@
                   </a:schemeClr>
                 </a:solidFill>
               </a:rPr>
-              <a:t>2. Multi-Step Prompting</a:t>
+              <a:t>1. Multi-Step Prompting</a:t>
             </a:r>
           </a:p>
           <a:p>
@@ -4055,7 +4102,7 @@
                   </a:schemeClr>
                 </a:solidFill>
               </a:rPr>
-              <a:t>✅ Multi-Step Prompt (Structured Thinking)</a:t>
+              <a:t>✅ Multi-Step Prompt (Structured Thinking) – 1 giant prompt</a:t>
             </a:r>
           </a:p>
           <a:p>
@@ -4110,9 +4157,7 @@
             </a:r>
           </a:p>
           <a:p>
-            <a:pPr rtl="0">
-              <a:buNone/>
-            </a:pPr>
+            <a:pPr lvl="2"/>
             <a:r>
               <a:rPr lang="en-US" sz="2400" dirty="0">
                 <a:solidFill>
@@ -4275,7 +4320,7 @@
         <p:spPr>
           <a:xfrm>
             <a:off x="201168" y="285442"/>
-            <a:ext cx="8887968" cy="1938992"/>
+            <a:ext cx="8887968" cy="1569660"/>
           </a:xfrm>
           <a:prstGeom prst="rect">
             <a:avLst/>
@@ -4325,7 +4370,7 @@
           </a:p>
           <a:p>
             <a:r>
-              <a:rPr lang="en-US" sz="2400" dirty="0">
+              <a:rPr lang="en-US" sz="2400" b="1" dirty="0">
                 <a:solidFill>
                   <a:schemeClr val="accent6">
                     <a:lumMod val="60000"/>
@@ -4333,18 +4378,8 @@
                   </a:schemeClr>
                 </a:solidFill>
               </a:rPr>
-              <a:t>foundation done, structure 70%, delay due to rain</a:t>
-            </a:r>
-          </a:p>
-          <a:p>
-            <a:endParaRPr lang="en-US" sz="2400" dirty="0">
-              <a:solidFill>
-                <a:schemeClr val="accent6">
-                  <a:lumMod val="60000"/>
-                  <a:lumOff val="40000"/>
-                </a:schemeClr>
-              </a:solidFill>
-            </a:endParaRPr>
+              <a:t>“foundation done, structure 70%, delay due to rain”</a:t>
+            </a:r>
           </a:p>
         </p:txBody>
       </p:sp>
@@ -4377,7 +4412,7 @@
           <a:lstStyle/>
           <a:p>
             <a:r>
-              <a:rPr lang="en-US" sz="2400" dirty="0">
+              <a:rPr lang="en-US" sz="2400" b="1" u="sng" dirty="0">
                 <a:solidFill>
                   <a:schemeClr val="accent6">
                     <a:lumMod val="60000"/>
@@ -4490,7 +4525,7 @@
         <p:spPr>
           <a:xfrm>
             <a:off x="201168" y="285442"/>
-            <a:ext cx="8887968" cy="1569660"/>
+            <a:ext cx="4855464" cy="1569660"/>
           </a:xfrm>
           <a:prstGeom prst="rect">
             <a:avLst/>
@@ -4512,7 +4547,7 @@
                   </a:schemeClr>
                 </a:solidFill>
               </a:rPr>
-              <a:t>3. Iterative Refinement</a:t>
+              <a:t>2. Iterative Refinement</a:t>
             </a:r>
           </a:p>
           <a:p>
@@ -4587,7 +4622,7 @@
         <p:spPr>
           <a:xfrm>
             <a:off x="201168" y="2274838"/>
-            <a:ext cx="6190488" cy="2308324"/>
+            <a:ext cx="4105656" cy="2677656"/>
           </a:xfrm>
           <a:prstGeom prst="rect">
             <a:avLst/>
@@ -4641,7 +4676,7 @@
                   </a:schemeClr>
                 </a:solidFill>
               </a:rPr>
-              <a:t>Step 1: Initial Prompt</a:t>
+              <a:t>Step 1: Initial Prompt1</a:t>
             </a:r>
           </a:p>
           <a:p>
@@ -4693,68 +4728,36 @@
           </a:p>
         </p:txBody>
       </p:sp>
-      <p:sp>
-        <p:nvSpPr>
-          <p:cNvPr id="7" name="TextBox 6">
-            <a:extLst>
-              <a:ext uri="{FF2B5EF4-FFF2-40B4-BE49-F238E27FC236}">
-                <a16:creationId xmlns:a16="http://schemas.microsoft.com/office/drawing/2014/main" id="{D32DF084-6AF9-066A-846F-FA804B5A7859}"/>
-              </a:ext>
-            </a:extLst>
-          </p:cNvPr>
-          <p:cNvSpPr txBox="1"/>
+      <p:pic>
+        <p:nvPicPr>
+          <p:cNvPr id="5" name="Picture 4">
+            <a:extLst>
+              <a:ext uri="{FF2B5EF4-FFF2-40B4-BE49-F238E27FC236}">
+                <a16:creationId xmlns:a16="http://schemas.microsoft.com/office/drawing/2014/main" id="{7C007540-534B-6B9C-EEA4-011AAF501A40}"/>
+              </a:ext>
+            </a:extLst>
+          </p:cNvPr>
+          <p:cNvPicPr>
+            <a:picLocks noChangeAspect="1"/>
+          </p:cNvPicPr>
           <p:nvPr/>
-        </p:nvSpPr>
+        </p:nvPicPr>
+        <p:blipFill>
+          <a:blip r:embed="rId2"/>
+          <a:stretch>
+            <a:fillRect/>
+          </a:stretch>
+        </p:blipFill>
         <p:spPr>
           <a:xfrm>
-            <a:off x="201168" y="5327827"/>
-            <a:ext cx="9171432" cy="830997"/>
+            <a:off x="4666200" y="143595"/>
+            <a:ext cx="7525800" cy="6058746"/>
           </a:xfrm>
           <a:prstGeom prst="rect">
             <a:avLst/>
           </a:prstGeom>
-          <a:noFill/>
         </p:spPr>
-        <p:txBody>
-          <a:bodyPr wrap="square">
-            <a:spAutoFit/>
-          </a:bodyPr>
-          <a:lstStyle/>
-          <a:p>
-            <a:pPr>
-              <a:buNone/>
-            </a:pPr>
-            <a:r>
-              <a:rPr lang="en-US" sz="2400" b="1" dirty="0">
-                <a:solidFill>
-                  <a:schemeClr val="accent6">
-                    <a:lumMod val="60000"/>
-                    <a:lumOff val="40000"/>
-                  </a:schemeClr>
-                </a:solidFill>
-              </a:rPr>
-              <a:t>Step 2: Improve Tone</a:t>
-            </a:r>
-          </a:p>
-          <a:p>
-            <a:pPr rtl="0">
-              <a:buNone/>
-            </a:pPr>
-            <a:r>
-              <a:rPr lang="en-US" sz="2400" dirty="0">
-                <a:solidFill>
-                  <a:schemeClr val="accent6">
-                    <a:lumMod val="60000"/>
-                    <a:lumOff val="40000"/>
-                  </a:schemeClr>
-                </a:solidFill>
-                <a:latin typeface="Courier New" panose="02070309020205020404" pitchFamily="49" charset="0"/>
-              </a:rPr>
-              <a:t>Make the email more polite and reassuring</a:t>
-            </a:r>
-          </a:p>
-        </p:txBody>
-      </p:sp>
+      </p:pic>
     </p:spTree>
     <p:extLst>
       <p:ext uri="{BB962C8B-B14F-4D97-AF65-F5344CB8AC3E}">
@@ -4769,6 +4772,134 @@
 </file>
 
 <file path=ppt/slides/slide6.xml><?xml version="1.0" encoding="utf-8"?>
+<p:sld xmlns:a="http://schemas.openxmlformats.org/drawingml/2006/main" xmlns:r="http://schemas.openxmlformats.org/officeDocument/2006/relationships" xmlns:p="http://schemas.openxmlformats.org/presentationml/2006/main">
+  <p:cSld>
+    <p:spTree>
+      <p:nvGrpSpPr>
+        <p:cNvPr id="1" name="">
+          <a:extLst>
+            <a:ext uri="{FF2B5EF4-FFF2-40B4-BE49-F238E27FC236}">
+              <a16:creationId xmlns:a16="http://schemas.microsoft.com/office/drawing/2014/main" id="{CA7BAC41-653D-8A6A-5C47-1A4183018D65}"/>
+            </a:ext>
+          </a:extLst>
+        </p:cNvPr>
+        <p:cNvGrpSpPr/>
+        <p:nvPr/>
+      </p:nvGrpSpPr>
+      <p:grpSpPr>
+        <a:xfrm>
+          <a:off x="0" y="0"/>
+          <a:ext cx="0" cy="0"/>
+          <a:chOff x="0" y="0"/>
+          <a:chExt cx="0" cy="0"/>
+        </a:xfrm>
+      </p:grpSpPr>
+      <p:sp>
+        <p:nvSpPr>
+          <p:cNvPr id="7" name="TextBox 6">
+            <a:extLst>
+              <a:ext uri="{FF2B5EF4-FFF2-40B4-BE49-F238E27FC236}">
+                <a16:creationId xmlns:a16="http://schemas.microsoft.com/office/drawing/2014/main" id="{CBF95C55-6EC5-D65A-2CC0-D813BC06E60E}"/>
+              </a:ext>
+            </a:extLst>
+          </p:cNvPr>
+          <p:cNvSpPr txBox="1"/>
+          <p:nvPr/>
+        </p:nvSpPr>
+        <p:spPr>
+          <a:xfrm>
+            <a:off x="64008" y="408355"/>
+            <a:ext cx="4910328" cy="1200329"/>
+          </a:xfrm>
+          <a:prstGeom prst="rect">
+            <a:avLst/>
+          </a:prstGeom>
+          <a:noFill/>
+        </p:spPr>
+        <p:txBody>
+          <a:bodyPr wrap="square">
+            <a:spAutoFit/>
+          </a:bodyPr>
+          <a:lstStyle/>
+          <a:p>
+            <a:pPr>
+              <a:buNone/>
+            </a:pPr>
+            <a:r>
+              <a:rPr lang="en-US" sz="2400" b="1" dirty="0">
+                <a:solidFill>
+                  <a:schemeClr val="accent6">
+                    <a:lumMod val="60000"/>
+                    <a:lumOff val="40000"/>
+                  </a:schemeClr>
+                </a:solidFill>
+              </a:rPr>
+              <a:t>Step 2: Improve Tone – Prompt2</a:t>
+            </a:r>
+          </a:p>
+          <a:p>
+            <a:pPr rtl="0">
+              <a:buNone/>
+            </a:pPr>
+            <a:r>
+              <a:rPr lang="en-US" sz="2400" dirty="0">
+                <a:solidFill>
+                  <a:schemeClr val="accent6">
+                    <a:lumMod val="60000"/>
+                    <a:lumOff val="40000"/>
+                  </a:schemeClr>
+                </a:solidFill>
+                <a:latin typeface="Courier New" panose="02070309020205020404" pitchFamily="49" charset="0"/>
+              </a:rPr>
+              <a:t>Make the email more polite and reassuring</a:t>
+            </a:r>
+          </a:p>
+        </p:txBody>
+      </p:sp>
+      <p:pic>
+        <p:nvPicPr>
+          <p:cNvPr id="5" name="Picture 4">
+            <a:extLst>
+              <a:ext uri="{FF2B5EF4-FFF2-40B4-BE49-F238E27FC236}">
+                <a16:creationId xmlns:a16="http://schemas.microsoft.com/office/drawing/2014/main" id="{355725ED-7B31-AEC5-4E8F-E4D73B0AA7CE}"/>
+              </a:ext>
+            </a:extLst>
+          </p:cNvPr>
+          <p:cNvPicPr>
+            <a:picLocks noChangeAspect="1"/>
+          </p:cNvPicPr>
+          <p:nvPr/>
+        </p:nvPicPr>
+        <p:blipFill>
+          <a:blip r:embed="rId2"/>
+          <a:stretch>
+            <a:fillRect/>
+          </a:stretch>
+        </p:blipFill>
+        <p:spPr>
+          <a:xfrm>
+            <a:off x="4554560" y="108134"/>
+            <a:ext cx="7573432" cy="6458851"/>
+          </a:xfrm>
+          <a:prstGeom prst="rect">
+            <a:avLst/>
+          </a:prstGeom>
+        </p:spPr>
+      </p:pic>
+    </p:spTree>
+    <p:extLst>
+      <p:ext uri="{BB962C8B-B14F-4D97-AF65-F5344CB8AC3E}">
+        <p14:creationId xmlns:p14="http://schemas.microsoft.com/office/powerpoint/2010/main" val="1834178258"/>
+      </p:ext>
+    </p:extLst>
+  </p:cSld>
+  <p:clrMapOvr>
+    <a:masterClrMapping/>
+  </p:clrMapOvr>
+</p:sld>
+</file>
+
+<file path=ppt/slides/slide7.xml><?xml version="1.0" encoding="utf-8"?>
 <p:sld xmlns:a="http://schemas.openxmlformats.org/drawingml/2006/main" xmlns:r="http://schemas.openxmlformats.org/officeDocument/2006/relationships" xmlns:p="http://schemas.openxmlformats.org/presentationml/2006/main">
   <p:cSld>
     <p:spTree>
@@ -4806,7 +4937,7 @@
         <p:spPr>
           <a:xfrm>
             <a:off x="214884" y="361295"/>
-            <a:ext cx="9294876" cy="1200329"/>
+            <a:ext cx="5207508" cy="1569660"/>
           </a:xfrm>
           <a:prstGeom prst="rect">
             <a:avLst/>
@@ -4831,7 +4962,7 @@
                   </a:schemeClr>
                 </a:solidFill>
               </a:rPr>
-              <a:t>Step 3: Add Business Detail</a:t>
+              <a:t>Step 3: Add Business Detail – Prompt3</a:t>
             </a:r>
           </a:p>
           <a:p>
@@ -4870,180 +5001,36 @@
           </a:p>
         </p:txBody>
       </p:sp>
-      <p:sp>
-        <p:nvSpPr>
-          <p:cNvPr id="8" name="TextBox 7">
-            <a:extLst>
-              <a:ext uri="{FF2B5EF4-FFF2-40B4-BE49-F238E27FC236}">
-                <a16:creationId xmlns:a16="http://schemas.microsoft.com/office/drawing/2014/main" id="{D8CE1917-5247-1FD4-56FA-3A137C1B3C1A}"/>
-              </a:ext>
-            </a:extLst>
-          </p:cNvPr>
-          <p:cNvSpPr txBox="1"/>
+      <p:pic>
+        <p:nvPicPr>
+          <p:cNvPr id="3" name="Picture 2">
+            <a:extLst>
+              <a:ext uri="{FF2B5EF4-FFF2-40B4-BE49-F238E27FC236}">
+                <a16:creationId xmlns:a16="http://schemas.microsoft.com/office/drawing/2014/main" id="{5541E58C-0031-C187-08C3-094AFD0C38BA}"/>
+              </a:ext>
+            </a:extLst>
+          </p:cNvPr>
+          <p:cNvPicPr>
+            <a:picLocks noChangeAspect="1"/>
+          </p:cNvPicPr>
           <p:nvPr/>
-        </p:nvSpPr>
+        </p:nvPicPr>
+        <p:blipFill>
+          <a:blip r:embed="rId2"/>
+          <a:stretch>
+            <a:fillRect/>
+          </a:stretch>
+        </p:blipFill>
         <p:spPr>
           <a:xfrm>
-            <a:off x="214884" y="2484043"/>
-            <a:ext cx="8426196" cy="830997"/>
+            <a:off x="3798413" y="1353312"/>
+            <a:ext cx="8178704" cy="4967805"/>
           </a:xfrm>
           <a:prstGeom prst="rect">
             <a:avLst/>
           </a:prstGeom>
-          <a:noFill/>
         </p:spPr>
-        <p:txBody>
-          <a:bodyPr wrap="square">
-            <a:spAutoFit/>
-          </a:bodyPr>
-          <a:lstStyle/>
-          <a:p>
-            <a:pPr>
-              <a:buNone/>
-            </a:pPr>
-            <a:r>
-              <a:rPr lang="en-US" sz="2400" b="1" dirty="0">
-                <a:solidFill>
-                  <a:schemeClr val="accent6">
-                    <a:lumMod val="60000"/>
-                    <a:lumOff val="40000"/>
-                  </a:schemeClr>
-                </a:solidFill>
-              </a:rPr>
-              <a:t>Step 4: Final Polish</a:t>
-            </a:r>
-          </a:p>
-          <a:p>
-            <a:pPr rtl="0">
-              <a:buNone/>
-            </a:pPr>
-            <a:r>
-              <a:rPr lang="en-US" sz="2400" dirty="0">
-                <a:solidFill>
-                  <a:schemeClr val="accent6">
-                    <a:lumMod val="60000"/>
-                    <a:lumOff val="40000"/>
-                  </a:schemeClr>
-                </a:solidFill>
-                <a:latin typeface="Courier New" panose="02070309020205020404" pitchFamily="49" charset="0"/>
-              </a:rPr>
-              <a:t>Make it suitable for high-value investors</a:t>
-            </a:r>
-          </a:p>
-        </p:txBody>
-      </p:sp>
-      <p:sp>
-        <p:nvSpPr>
-          <p:cNvPr id="10" name="TextBox 9">
-            <a:extLst>
-              <a:ext uri="{FF2B5EF4-FFF2-40B4-BE49-F238E27FC236}">
-                <a16:creationId xmlns:a16="http://schemas.microsoft.com/office/drawing/2014/main" id="{58D84444-5047-7F16-ECCB-247883F85EC9}"/>
-              </a:ext>
-            </a:extLst>
-          </p:cNvPr>
-          <p:cNvSpPr txBox="1"/>
-          <p:nvPr/>
-        </p:nvSpPr>
-        <p:spPr>
-          <a:xfrm>
-            <a:off x="214884" y="4135088"/>
-            <a:ext cx="7877556" cy="1938992"/>
-          </a:xfrm>
-          <a:prstGeom prst="rect">
-            <a:avLst/>
-          </a:prstGeom>
-          <a:noFill/>
-        </p:spPr>
-        <p:txBody>
-          <a:bodyPr wrap="square">
-            <a:spAutoFit/>
-          </a:bodyPr>
-          <a:lstStyle/>
-          <a:p>
-            <a:pPr>
-              <a:buNone/>
-            </a:pPr>
-            <a:r>
-              <a:rPr lang="en-US" sz="2400" b="1" dirty="0">
-                <a:solidFill>
-                  <a:schemeClr val="accent6">
-                    <a:lumMod val="60000"/>
-                    <a:lumOff val="40000"/>
-                  </a:schemeClr>
-                </a:solidFill>
-              </a:rPr>
-              <a:t>What’s happening?</a:t>
-            </a:r>
-          </a:p>
-          <a:p>
-            <a:pPr>
-              <a:buNone/>
-            </a:pPr>
-            <a:r>
-              <a:rPr lang="en-US" sz="2400" dirty="0">
-                <a:solidFill>
-                  <a:schemeClr val="accent6">
-                    <a:lumMod val="60000"/>
-                    <a:lumOff val="40000"/>
-                  </a:schemeClr>
-                </a:solidFill>
-              </a:rPr>
-              <a:t>👉 You are:</a:t>
-            </a:r>
-          </a:p>
-          <a:p>
-            <a:pPr marL="342900" indent="-342900">
-              <a:buFont typeface="Arial" panose="020B0604020202020204" pitchFamily="34" charset="0"/>
-              <a:buChar char="•"/>
-            </a:pPr>
-            <a:r>
-              <a:rPr lang="en-US" sz="2400" dirty="0">
-                <a:solidFill>
-                  <a:schemeClr val="accent6">
-                    <a:lumMod val="60000"/>
-                    <a:lumOff val="40000"/>
-                  </a:schemeClr>
-                </a:solidFill>
-              </a:rPr>
-              <a:t>Guiding AI </a:t>
-            </a:r>
-          </a:p>
-          <a:p>
-            <a:pPr marL="342900" indent="-342900">
-              <a:buFont typeface="Arial" panose="020B0604020202020204" pitchFamily="34" charset="0"/>
-              <a:buChar char="•"/>
-            </a:pPr>
-            <a:r>
-              <a:rPr lang="en-US" sz="2400" dirty="0">
-                <a:solidFill>
-                  <a:schemeClr val="accent6">
-                    <a:lumMod val="60000"/>
-                    <a:lumOff val="40000"/>
-                  </a:schemeClr>
-                </a:solidFill>
-              </a:rPr>
-              <a:t>Refining output </a:t>
-            </a:r>
-          </a:p>
-          <a:p>
-            <a:pPr marL="342900" indent="-342900">
-              <a:buFont typeface="Arial" panose="020B0604020202020204" pitchFamily="34" charset="0"/>
-              <a:buChar char="•"/>
-            </a:pPr>
-            <a:r>
-              <a:rPr lang="en-US" sz="2400" dirty="0">
-                <a:solidFill>
-                  <a:schemeClr val="accent6">
-                    <a:lumMod val="60000"/>
-                    <a:lumOff val="40000"/>
-                  </a:schemeClr>
-                </a:solidFill>
-              </a:rPr>
-              <a:t>Moving toward business quality </a:t>
-            </a:r>
-          </a:p>
-        </p:txBody>
-      </p:sp>
+      </p:pic>
     </p:spTree>
     <p:extLst>
       <p:ext uri="{BB962C8B-B14F-4D97-AF65-F5344CB8AC3E}">
@@ -5057,7 +5044,247 @@
 </p:sld>
 </file>
 
-<file path=ppt/slides/slide7.xml><?xml version="1.0" encoding="utf-8"?>
+<file path=ppt/slides/slide8.xml><?xml version="1.0" encoding="utf-8"?>
+<p:sld xmlns:a="http://schemas.openxmlformats.org/drawingml/2006/main" xmlns:r="http://schemas.openxmlformats.org/officeDocument/2006/relationships" xmlns:p="http://schemas.openxmlformats.org/presentationml/2006/main">
+  <p:cSld>
+    <p:spTree>
+      <p:nvGrpSpPr>
+        <p:cNvPr id="1" name="">
+          <a:extLst>
+            <a:ext uri="{FF2B5EF4-FFF2-40B4-BE49-F238E27FC236}">
+              <a16:creationId xmlns:a16="http://schemas.microsoft.com/office/drawing/2014/main" id="{4BDF03B5-5A8C-36F4-4D63-67A7AE28687C}"/>
+            </a:ext>
+          </a:extLst>
+        </p:cNvPr>
+        <p:cNvGrpSpPr/>
+        <p:nvPr/>
+      </p:nvGrpSpPr>
+      <p:grpSpPr>
+        <a:xfrm>
+          <a:off x="0" y="0"/>
+          <a:ext cx="0" cy="0"/>
+          <a:chOff x="0" y="0"/>
+          <a:chExt cx="0" cy="0"/>
+        </a:xfrm>
+      </p:grpSpPr>
+      <p:sp>
+        <p:nvSpPr>
+          <p:cNvPr id="8" name="TextBox 7">
+            <a:extLst>
+              <a:ext uri="{FF2B5EF4-FFF2-40B4-BE49-F238E27FC236}">
+                <a16:creationId xmlns:a16="http://schemas.microsoft.com/office/drawing/2014/main" id="{A3AB8A41-99D8-23B1-D0A0-93BEC827D685}"/>
+              </a:ext>
+            </a:extLst>
+          </p:cNvPr>
+          <p:cNvSpPr txBox="1"/>
+          <p:nvPr/>
+        </p:nvSpPr>
+        <p:spPr>
+          <a:xfrm>
+            <a:off x="214884" y="289483"/>
+            <a:ext cx="4302252" cy="1200329"/>
+          </a:xfrm>
+          <a:prstGeom prst="rect">
+            <a:avLst/>
+          </a:prstGeom>
+          <a:noFill/>
+        </p:spPr>
+        <p:txBody>
+          <a:bodyPr wrap="square">
+            <a:spAutoFit/>
+          </a:bodyPr>
+          <a:lstStyle/>
+          <a:p>
+            <a:pPr>
+              <a:buNone/>
+            </a:pPr>
+            <a:r>
+              <a:rPr lang="en-US" sz="2400" b="1" dirty="0">
+                <a:solidFill>
+                  <a:schemeClr val="accent6">
+                    <a:lumMod val="60000"/>
+                    <a:lumOff val="40000"/>
+                  </a:schemeClr>
+                </a:solidFill>
+              </a:rPr>
+              <a:t>Step 4: Final Polish – Prompt4</a:t>
+            </a:r>
+          </a:p>
+          <a:p>
+            <a:pPr rtl="0">
+              <a:buNone/>
+            </a:pPr>
+            <a:r>
+              <a:rPr lang="en-US" sz="2400" dirty="0">
+                <a:solidFill>
+                  <a:schemeClr val="accent6">
+                    <a:lumMod val="60000"/>
+                    <a:lumOff val="40000"/>
+                  </a:schemeClr>
+                </a:solidFill>
+                <a:latin typeface="Courier New" panose="02070309020205020404" pitchFamily="49" charset="0"/>
+              </a:rPr>
+              <a:t>Make it suitable for high-value investors</a:t>
+            </a:r>
+          </a:p>
+        </p:txBody>
+      </p:sp>
+      <p:sp>
+        <p:nvSpPr>
+          <p:cNvPr id="10" name="TextBox 9">
+            <a:extLst>
+              <a:ext uri="{FF2B5EF4-FFF2-40B4-BE49-F238E27FC236}">
+                <a16:creationId xmlns:a16="http://schemas.microsoft.com/office/drawing/2014/main" id="{DAFFB8F0-1620-08A7-8022-FC48A4BEFE0A}"/>
+              </a:ext>
+            </a:extLst>
+          </p:cNvPr>
+          <p:cNvSpPr txBox="1"/>
+          <p:nvPr/>
+        </p:nvSpPr>
+        <p:spPr>
+          <a:xfrm>
+            <a:off x="141732" y="3065240"/>
+            <a:ext cx="4101084" cy="2308324"/>
+          </a:xfrm>
+          <a:prstGeom prst="rect">
+            <a:avLst/>
+          </a:prstGeom>
+          <a:noFill/>
+        </p:spPr>
+        <p:txBody>
+          <a:bodyPr wrap="square">
+            <a:spAutoFit/>
+          </a:bodyPr>
+          <a:lstStyle/>
+          <a:p>
+            <a:pPr>
+              <a:buNone/>
+            </a:pPr>
+            <a:r>
+              <a:rPr lang="en-US" sz="2400" b="1" dirty="0">
+                <a:solidFill>
+                  <a:schemeClr val="accent6">
+                    <a:lumMod val="60000"/>
+                    <a:lumOff val="40000"/>
+                  </a:schemeClr>
+                </a:solidFill>
+              </a:rPr>
+              <a:t>What’s happening?</a:t>
+            </a:r>
+          </a:p>
+          <a:p>
+            <a:pPr>
+              <a:buNone/>
+            </a:pPr>
+            <a:r>
+              <a:rPr lang="en-US" sz="2400" dirty="0">
+                <a:solidFill>
+                  <a:schemeClr val="accent6">
+                    <a:lumMod val="60000"/>
+                    <a:lumOff val="40000"/>
+                  </a:schemeClr>
+                </a:solidFill>
+              </a:rPr>
+              <a:t>👉 You are:</a:t>
+            </a:r>
+          </a:p>
+          <a:p>
+            <a:pPr marL="342900" indent="-342900">
+              <a:buFont typeface="Arial" panose="020B0604020202020204" pitchFamily="34" charset="0"/>
+              <a:buChar char="•"/>
+            </a:pPr>
+            <a:r>
+              <a:rPr lang="en-US" sz="2400" dirty="0">
+                <a:solidFill>
+                  <a:schemeClr val="accent6">
+                    <a:lumMod val="60000"/>
+                    <a:lumOff val="40000"/>
+                  </a:schemeClr>
+                </a:solidFill>
+              </a:rPr>
+              <a:t>Guiding AI </a:t>
+            </a:r>
+          </a:p>
+          <a:p>
+            <a:pPr marL="342900" indent="-342900">
+              <a:buFont typeface="Arial" panose="020B0604020202020204" pitchFamily="34" charset="0"/>
+              <a:buChar char="•"/>
+            </a:pPr>
+            <a:r>
+              <a:rPr lang="en-US" sz="2400" dirty="0">
+                <a:solidFill>
+                  <a:schemeClr val="accent6">
+                    <a:lumMod val="60000"/>
+                    <a:lumOff val="40000"/>
+                  </a:schemeClr>
+                </a:solidFill>
+              </a:rPr>
+              <a:t>Refining output </a:t>
+            </a:r>
+          </a:p>
+          <a:p>
+            <a:pPr marL="342900" indent="-342900">
+              <a:buFont typeface="Arial" panose="020B0604020202020204" pitchFamily="34" charset="0"/>
+              <a:buChar char="•"/>
+            </a:pPr>
+            <a:r>
+              <a:rPr lang="en-US" sz="2400" dirty="0">
+                <a:solidFill>
+                  <a:schemeClr val="accent6">
+                    <a:lumMod val="60000"/>
+                    <a:lumOff val="40000"/>
+                  </a:schemeClr>
+                </a:solidFill>
+              </a:rPr>
+              <a:t>Moving toward business quality </a:t>
+            </a:r>
+          </a:p>
+        </p:txBody>
+      </p:sp>
+      <p:pic>
+        <p:nvPicPr>
+          <p:cNvPr id="3" name="Picture 2">
+            <a:extLst>
+              <a:ext uri="{FF2B5EF4-FFF2-40B4-BE49-F238E27FC236}">
+                <a16:creationId xmlns:a16="http://schemas.microsoft.com/office/drawing/2014/main" id="{C63415E2-7452-48A0-0087-5394ED9F19B5}"/>
+              </a:ext>
+            </a:extLst>
+          </p:cNvPr>
+          <p:cNvPicPr>
+            <a:picLocks noChangeAspect="1"/>
+          </p:cNvPicPr>
+          <p:nvPr/>
+        </p:nvPicPr>
+        <p:blipFill>
+          <a:blip r:embed="rId2"/>
+          <a:stretch>
+            <a:fillRect/>
+          </a:stretch>
+        </p:blipFill>
+        <p:spPr>
+          <a:xfrm>
+            <a:off x="4666200" y="68770"/>
+            <a:ext cx="7525800" cy="5458587"/>
+          </a:xfrm>
+          <a:prstGeom prst="rect">
+            <a:avLst/>
+          </a:prstGeom>
+        </p:spPr>
+      </p:pic>
+    </p:spTree>
+    <p:extLst>
+      <p:ext uri="{BB962C8B-B14F-4D97-AF65-F5344CB8AC3E}">
+        <p14:creationId xmlns:p14="http://schemas.microsoft.com/office/powerpoint/2010/main" val="165780498"/>
+      </p:ext>
+    </p:extLst>
+  </p:cSld>
+  <p:clrMapOvr>
+    <a:masterClrMapping/>
+  </p:clrMapOvr>
+</p:sld>
+</file>
+
+<file path=ppt/slides/slide9.xml><?xml version="1.0" encoding="utf-8"?>
 <p:sld xmlns:a="http://schemas.openxmlformats.org/drawingml/2006/main" xmlns:r="http://schemas.openxmlformats.org/officeDocument/2006/relationships" xmlns:p="http://schemas.openxmlformats.org/presentationml/2006/main">
   <p:cSld>
     <p:spTree>
@@ -5095,7 +5322,7 @@
         <p:spPr>
           <a:xfrm>
             <a:off x="338328" y="511386"/>
-            <a:ext cx="10003536" cy="3416320"/>
+            <a:ext cx="10003536" cy="3785652"/>
           </a:xfrm>
           <a:prstGeom prst="rect">
             <a:avLst/>
@@ -5120,7 +5347,7 @@
                   </a:schemeClr>
                 </a:solidFill>
               </a:rPr>
-              <a:t>4. Combined Example</a:t>
+              <a:t>3. Combined Example</a:t>
             </a:r>
           </a:p>
           <a:p>
@@ -5153,9 +5380,6 @@
             </a:r>
           </a:p>
           <a:p>
-            <a:pPr rtl="0">
-              <a:buNone/>
-            </a:pPr>
             <a:r>
               <a:rPr lang="en-US" sz="2400" dirty="0">
                 <a:solidFill>
@@ -5166,13 +5390,10 @@
                 </a:solidFill>
                 <a:latin typeface="Courier New" panose="02070309020205020404" pitchFamily="49" charset="0"/>
               </a:rPr>
-              <a:t>Step 1: Extract key details from raw notes</a:t>
-            </a:r>
-          </a:p>
-          <a:p>
-            <a:pPr rtl="0">
-              <a:buNone/>
-            </a:pPr>
+              <a:t>Step 1: Write an email for project delay</a:t>
+            </a:r>
+          </a:p>
+          <a:p>
             <a:r>
               <a:rPr lang="en-US" sz="2400" dirty="0">
                 <a:solidFill>
@@ -5183,13 +5404,10 @@
                 </a:solidFill>
                 <a:latin typeface="Courier New" panose="02070309020205020404" pitchFamily="49" charset="0"/>
               </a:rPr>
-              <a:t>Step 2: Generate a structured report</a:t>
-            </a:r>
-          </a:p>
-          <a:p>
-            <a:pPr rtl="0">
-              <a:buNone/>
-            </a:pPr>
+              <a:t>Step 2: Make the email more polite and reassuring</a:t>
+            </a:r>
+          </a:p>
+          <a:p>
             <a:r>
               <a:rPr lang="en-US" sz="2400" dirty="0">
                 <a:solidFill>
@@ -5200,13 +5418,10 @@
                 </a:solidFill>
                 <a:latin typeface="Courier New" panose="02070309020205020404" pitchFamily="49" charset="0"/>
               </a:rPr>
-              <a:t>Step 3: Improve tone for client presentation</a:t>
-            </a:r>
-          </a:p>
-          <a:p>
-            <a:pPr rtl="0">
-              <a:buNone/>
-            </a:pPr>
+              <a:t>Step 3: Add reason: rain delay and material shortage</a:t>
+            </a:r>
+          </a:p>
+          <a:p>
             <a:r>
               <a:rPr lang="en-US" sz="2400" dirty="0">
                 <a:solidFill>
@@ -5217,7 +5432,21 @@
                 </a:solidFill>
                 <a:latin typeface="Courier New" panose="02070309020205020404" pitchFamily="49" charset="0"/>
               </a:rPr>
-              <a:t>Step 4: Make it concise and professional</a:t>
+              <a:t>Keep it concise</a:t>
+            </a:r>
+          </a:p>
+          <a:p>
+            <a:r>
+              <a:rPr lang="en-US" sz="2400" dirty="0">
+                <a:solidFill>
+                  <a:schemeClr val="accent6">
+                    <a:lumMod val="60000"/>
+                    <a:lumOff val="40000"/>
+                  </a:schemeClr>
+                </a:solidFill>
+                <a:latin typeface="Courier New" panose="02070309020205020404" pitchFamily="49" charset="0"/>
+              </a:rPr>
+              <a:t>Step 4: Make it suitable for high-value investors</a:t>
             </a:r>
           </a:p>
           <a:p>
@@ -5256,42 +5485,6 @@
     <p:extLst>
       <p:ext uri="{BB962C8B-B14F-4D97-AF65-F5344CB8AC3E}">
         <p14:creationId xmlns:p14="http://schemas.microsoft.com/office/powerpoint/2010/main" val="3013544641"/>
-      </p:ext>
-    </p:extLst>
-  </p:cSld>
-  <p:clrMapOvr>
-    <a:masterClrMapping/>
-  </p:clrMapOvr>
-</p:sld>
-</file>
-
-<file path=ppt/slides/slide8.xml><?xml version="1.0" encoding="utf-8"?>
-<p:sld xmlns:a="http://schemas.openxmlformats.org/drawingml/2006/main" xmlns:r="http://schemas.openxmlformats.org/officeDocument/2006/relationships" xmlns:p="http://schemas.openxmlformats.org/presentationml/2006/main">
-  <p:cSld>
-    <p:spTree>
-      <p:nvGrpSpPr>
-        <p:cNvPr id="1" name="">
-          <a:extLst>
-            <a:ext uri="{FF2B5EF4-FFF2-40B4-BE49-F238E27FC236}">
-              <a16:creationId xmlns:a16="http://schemas.microsoft.com/office/drawing/2014/main" id="{8033F83F-CC0B-EBD0-83A9-B6B5C6F14088}"/>
-            </a:ext>
-          </a:extLst>
-        </p:cNvPr>
-        <p:cNvGrpSpPr/>
-        <p:nvPr/>
-      </p:nvGrpSpPr>
-      <p:grpSpPr>
-        <a:xfrm>
-          <a:off x="0" y="0"/>
-          <a:ext cx="0" cy="0"/>
-          <a:chOff x="0" y="0"/>
-          <a:chExt cx="0" cy="0"/>
-        </a:xfrm>
-      </p:grpSpPr>
-    </p:spTree>
-    <p:extLst>
-      <p:ext uri="{BB962C8B-B14F-4D97-AF65-F5344CB8AC3E}">
-        <p14:creationId xmlns:p14="http://schemas.microsoft.com/office/powerpoint/2010/main" val="3872959198"/>
       </p:ext>
     </p:extLst>
   </p:cSld>
